--- a/production/releases/chapter-07/07-ch7-edison-unit-synthesis-slides.pptx
+++ b/production/releases/chapter-07/07-ch7-edison-unit-synthesis-slides.pptx
@@ -3222,7 +3222,7 @@
                 </a:solidFill>
                 <a:latin typeface="Arial"/>
               </a:rPr>
-              <a:t>Thomas A. Edison · Chapter 7 · Grade 4 · Week 9</a:t>
+              <a:t>Thomas A. Edison · Chapter 7 · Grade 4 · Week 4</a:t>
             </a:r>
           </a:p>
         </p:txBody>
@@ -4830,7 +4830,7 @@
                 </a:solidFill>
                 <a:latin typeface="Arial"/>
               </a:rPr>
-              <a:t>Notebook — Insert 1</a:t>
+              <a:t>Notes — Insert 1</a:t>
             </a:r>
           </a:p>
         </p:txBody>
@@ -4953,7 +4953,7 @@
                 </a:solidFill>
                 <a:latin typeface="Arial"/>
               </a:rPr>
-              <a:t>NOTEBOOK</a:t>
+              <a:t>NOTES</a:t>
             </a:r>
           </a:p>
         </p:txBody>
@@ -8755,7 +8755,7 @@
                 </a:solidFill>
                 <a:latin typeface="Arial"/>
               </a:rPr>
-              <a:t>Notebook — Insert 2</a:t>
+              <a:t>Notes — Insert 2</a:t>
             </a:r>
           </a:p>
         </p:txBody>
@@ -8878,7 +8878,7 @@
                 </a:solidFill>
                 <a:latin typeface="Arial"/>
               </a:rPr>
-              <a:t>NOTEBOOK</a:t>
+              <a:t>NOTES</a:t>
             </a:r>
           </a:p>
         </p:txBody>
@@ -12663,7 +12663,7 @@
                 </a:solidFill>
                 <a:latin typeface="Arial"/>
               </a:rPr>
-              <a:t>NOTEBOOK</a:t>
+              <a:t>NOTES</a:t>
             </a:r>
           </a:p>
         </p:txBody>
@@ -12718,7 +12718,7 @@
                 </a:solidFill>
                 <a:latin typeface="Arial"/>
               </a:rPr>
-              <a:t>Notebook Insert 3 — Unit Reflection: something I can explain, strong evidence,</a:t>
+              <a:t>Notes Insert 3 — Unit Reflection: something I can explain, strong evidence,</a:t>
             </a:r>
           </a:p>
           <a:p>
